--- a/business-docs/MicroPulse-Pitch-Deck-EN.pptx
+++ b/business-docs/MicroPulse-Pitch-Deck-EN.pptx
@@ -16144,7 +16144,7 @@
                 </a:solidFill>
                 <a:latin typeface="Arial Black"/>
               </a:rPr>
-              <a:t>Pilot club results</a:t>
+              <a:t>How readiness is calculated</a:t>
             </a:r>
           </a:p>
         </p:txBody>
@@ -16214,7 +16214,7 @@
                 </a:solidFill>
                 <a:latin typeface="Calibri"/>
               </a:rPr>
-              <a:t>Top-tier club · 24 players · 8 weeks</a:t>
+              <a:t>Three scoring models  ·  Daily per athlete  ·  Always explainable</a:t>
             </a:r>
           </a:p>
         </p:txBody>
@@ -16343,7 +16343,7 @@
                 </a:solidFill>
                 <a:latin typeface="Arial Black"/>
               </a:rPr>
-              <a:t>-38%</a:t>
+              <a:t>ACWR</a:t>
             </a:r>
           </a:p>
         </p:txBody>
@@ -16378,7 +16378,7 @@
                 </a:solidFill>
                 <a:latin typeface="Arial Black"/>
               </a:rPr>
-              <a:t>soft-tissue injuries</a:t>
+              <a:t>Acute-to-chronic ratio</a:t>
             </a:r>
           </a:p>
         </p:txBody>
@@ -16413,7 +16413,7 @@
                 </a:solidFill>
                 <a:latin typeface="Calibri"/>
               </a:rPr>
-              <a:t>Compared to same period prior year</a:t>
+              <a:t>Per Gabbett 2016 / Hulin 2016</a:t>
             </a:r>
           </a:p>
         </p:txBody>
@@ -16542,7 +16542,7 @@
                 </a:solidFill>
                 <a:latin typeface="Arial Black"/>
               </a:rPr>
-              <a:t>96%</a:t>
+              <a:t>MLI</a:t>
             </a:r>
           </a:p>
         </p:txBody>
@@ -16577,7 +16577,7 @@
                 </a:solidFill>
                 <a:latin typeface="Arial Black"/>
               </a:rPr>
-              <a:t>daily check-in rate</a:t>
+              <a:t>Mechanical Load Index</a:t>
             </a:r>
           </a:p>
         </p:txBody>
@@ -16612,7 +16612,7 @@
                 </a:solidFill>
                 <a:latin typeface="Calibri"/>
               </a:rPr>
-              <a:t>Squad participation every single day</a:t>
+              <a:t>Decel, accel, CoD, PlayerLoad density</a:t>
             </a:r>
           </a:p>
         </p:txBody>
@@ -16741,7 +16741,7 @@
                 </a:solidFill>
                 <a:latin typeface="Arial Black"/>
               </a:rPr>
-              <a:t>15 min</a:t>
+              <a:t>CMJ</a:t>
             </a:r>
           </a:p>
         </p:txBody>
@@ -16776,7 +16776,7 @@
                 </a:solidFill>
                 <a:latin typeface="Arial Black"/>
               </a:rPr>
-              <a:t>saved per day</a:t>
+              <a:t>Force-plate freshness</a:t>
             </a:r>
           </a:p>
         </p:txBody>
@@ -16811,7 +16811,7 @@
                 </a:solidFill>
                 <a:latin typeface="Calibri"/>
               </a:rPr>
-              <a:t>Assistant coach data-collection time</a:t>
+              <a:t>Asymmetry, RSI, contraction time</a:t>
             </a:r>
           </a:p>
         </p:txBody>
@@ -16846,7 +16846,7 @@
                 </a:solidFill>
                 <a:latin typeface="Calibri"/>
               </a:rPr>
-              <a:t>"The first tool our staff opens every morning."</a:t>
+              <a:t>"All three feed one GREEN / YELLOW / RED state per athlete."</a:t>
             </a:r>
           </a:p>
         </p:txBody>
@@ -16881,7 +16881,7 @@
                 </a:solidFill>
                 <a:latin typeface="Calibri"/>
               </a:rPr>
-              <a:t>— Physio, pilot club</a:t>
+              <a:t>— Adaptive Training Engine</a:t>
             </a:r>
           </a:p>
         </p:txBody>
